--- a/Science_Complete_Course_SagarSir/04_Science_MahaManthan_मॉक_टेस्ट्स/Class_19_Grand_Chemistry_MahaManthan.pptx
+++ b/Science_Complete_Course_SagarSir/04_Science_MahaManthan_मॉक_टेस्ट्स/Class_19_Grand_Chemistry_MahaManthan.pptx
@@ -3583,7 +3583,7 @@
               </a:defRPr>
             </a:pPr>
             <a:r>
-              <a:t>मार्गदर्शक: सागर सर (NMMS King)  |  Helpline / WhatsApp: +91 91101 13671  |  Website: sagarcoaching.tech</a:t>
+              <a:t>मार्गदर्शक: सागर सर (NMMS King)  |  Website: sagarcoaching.tech</a:t>
             </a:r>
           </a:p>
         </p:txBody>
@@ -3755,7 +3755,7 @@
               </a:defRPr>
             </a:pPr>
             <a:r>
-              <a:t>WhatsApp / Helpline: +91 91101 13671  |  वेबसाइट: sagarcoaching.tech  |  Slide 10 of 63</a:t>
+              <a:t>वेबसाइट: sagarcoaching.tech  |  Slide 10 of 63</a:t>
             </a:r>
           </a:p>
         </p:txBody>
@@ -4273,7 +4273,7 @@
               </a:defRPr>
             </a:pPr>
             <a:r>
-              <a:t>WhatsApp / Helpline: +91 91101 13671  |  वेबसाइट: sagarcoaching.tech  |  Slide 11 of 63</a:t>
+              <a:t>वेबसाइट: sagarcoaching.tech  |  Slide 11 of 63</a:t>
             </a:r>
           </a:p>
         </p:txBody>
@@ -4720,7 +4720,7 @@
               </a:defRPr>
             </a:pPr>
             <a:r>
-              <a:t>WhatsApp / Helpline: +91 91101 13671  |  वेबसाइट: sagarcoaching.tech  |  Slide 12 of 63</a:t>
+              <a:t>वेबसाइट: sagarcoaching.tech  |  Slide 12 of 63</a:t>
             </a:r>
           </a:p>
         </p:txBody>
@@ -5238,7 +5238,7 @@
               </a:defRPr>
             </a:pPr>
             <a:r>
-              <a:t>WhatsApp / Helpline: +91 91101 13671  |  वेबसाइट: sagarcoaching.tech  |  Slide 13 of 63</a:t>
+              <a:t>वेबसाइट: sagarcoaching.tech  |  Slide 13 of 63</a:t>
             </a:r>
           </a:p>
         </p:txBody>
@@ -5685,7 +5685,7 @@
               </a:defRPr>
             </a:pPr>
             <a:r>
-              <a:t>WhatsApp / Helpline: +91 91101 13671  |  वेबसाइट: sagarcoaching.tech  |  Slide 14 of 63</a:t>
+              <a:t>वेबसाइट: sagarcoaching.tech  |  Slide 14 of 63</a:t>
             </a:r>
           </a:p>
         </p:txBody>
@@ -6203,7 +6203,7 @@
               </a:defRPr>
             </a:pPr>
             <a:r>
-              <a:t>WhatsApp / Helpline: +91 91101 13671  |  वेबसाइट: sagarcoaching.tech  |  Slide 15 of 63</a:t>
+              <a:t>वेबसाइट: sagarcoaching.tech  |  Slide 15 of 63</a:t>
             </a:r>
           </a:p>
         </p:txBody>
@@ -6650,7 +6650,7 @@
               </a:defRPr>
             </a:pPr>
             <a:r>
-              <a:t>WhatsApp / Helpline: +91 91101 13671  |  वेबसाइट: sagarcoaching.tech  |  Slide 16 of 63</a:t>
+              <a:t>वेबसाइट: sagarcoaching.tech  |  Slide 16 of 63</a:t>
             </a:r>
           </a:p>
         </p:txBody>
@@ -7168,7 +7168,7 @@
               </a:defRPr>
             </a:pPr>
             <a:r>
-              <a:t>WhatsApp / Helpline: +91 91101 13671  |  वेबसाइट: sagarcoaching.tech  |  Slide 17 of 63</a:t>
+              <a:t>वेबसाइट: sagarcoaching.tech  |  Slide 17 of 63</a:t>
             </a:r>
           </a:p>
         </p:txBody>
@@ -7615,7 +7615,7 @@
               </a:defRPr>
             </a:pPr>
             <a:r>
-              <a:t>WhatsApp / Helpline: +91 91101 13671  |  वेबसाइट: sagarcoaching.tech  |  Slide 18 of 63</a:t>
+              <a:t>वेबसाइट: sagarcoaching.tech  |  Slide 18 of 63</a:t>
             </a:r>
           </a:p>
         </p:txBody>
@@ -8133,7 +8133,7 @@
               </a:defRPr>
             </a:pPr>
             <a:r>
-              <a:t>WhatsApp / Helpline: +91 91101 13671  |  वेबसाइट: sagarcoaching.tech  |  Slide 19 of 63</a:t>
+              <a:t>वेबसाइट: sagarcoaching.tech  |  Slide 19 of 63</a:t>
             </a:r>
           </a:p>
         </p:txBody>
@@ -8580,7 +8580,7 @@
               </a:defRPr>
             </a:pPr>
             <a:r>
-              <a:t>WhatsApp / Helpline: +91 91101 13671  |  वेबसाइट: sagarcoaching.tech  |  Slide 2 of 63</a:t>
+              <a:t>वेबसाइट: sagarcoaching.tech  |  Slide 2 of 63</a:t>
             </a:r>
           </a:p>
         </p:txBody>
@@ -8921,7 +8921,7 @@
               </a:defRPr>
             </a:pPr>
             <a:r>
-              <a:t>WhatsApp / Helpline: +91 91101 13671  |  वेबसाइट: sagarcoaching.tech  |  Slide 20 of 63</a:t>
+              <a:t>वेबसाइट: sagarcoaching.tech  |  Slide 20 of 63</a:t>
             </a:r>
           </a:p>
         </p:txBody>
@@ -9439,7 +9439,7 @@
               </a:defRPr>
             </a:pPr>
             <a:r>
-              <a:t>WhatsApp / Helpline: +91 91101 13671  |  वेबसाइट: sagarcoaching.tech  |  Slide 21 of 63</a:t>
+              <a:t>वेबसाइट: sagarcoaching.tech  |  Slide 21 of 63</a:t>
             </a:r>
           </a:p>
         </p:txBody>
@@ -9886,7 +9886,7 @@
               </a:defRPr>
             </a:pPr>
             <a:r>
-              <a:t>WhatsApp / Helpline: +91 91101 13671  |  वेबसाइट: sagarcoaching.tech  |  Slide 22 of 63</a:t>
+              <a:t>वेबसाइट: sagarcoaching.tech  |  Slide 22 of 63</a:t>
             </a:r>
           </a:p>
         </p:txBody>
@@ -10404,7 +10404,7 @@
               </a:defRPr>
             </a:pPr>
             <a:r>
-              <a:t>WhatsApp / Helpline: +91 91101 13671  |  वेबसाइट: sagarcoaching.tech  |  Slide 23 of 63</a:t>
+              <a:t>वेबसाइट: sagarcoaching.tech  |  Slide 23 of 63</a:t>
             </a:r>
           </a:p>
         </p:txBody>
@@ -10851,7 +10851,7 @@
               </a:defRPr>
             </a:pPr>
             <a:r>
-              <a:t>WhatsApp / Helpline: +91 91101 13671  |  वेबसाइट: sagarcoaching.tech  |  Slide 24 of 63</a:t>
+              <a:t>वेबसाइट: sagarcoaching.tech  |  Slide 24 of 63</a:t>
             </a:r>
           </a:p>
         </p:txBody>
@@ -11369,7 +11369,7 @@
               </a:defRPr>
             </a:pPr>
             <a:r>
-              <a:t>WhatsApp / Helpline: +91 91101 13671  |  वेबसाइट: sagarcoaching.tech  |  Slide 25 of 63</a:t>
+              <a:t>वेबसाइट: sagarcoaching.tech  |  Slide 25 of 63</a:t>
             </a:r>
           </a:p>
         </p:txBody>
@@ -11816,7 +11816,7 @@
               </a:defRPr>
             </a:pPr>
             <a:r>
-              <a:t>WhatsApp / Helpline: +91 91101 13671  |  वेबसाइट: sagarcoaching.tech  |  Slide 26 of 63</a:t>
+              <a:t>वेबसाइट: sagarcoaching.tech  |  Slide 26 of 63</a:t>
             </a:r>
           </a:p>
         </p:txBody>
@@ -12334,7 +12334,7 @@
               </a:defRPr>
             </a:pPr>
             <a:r>
-              <a:t>WhatsApp / Helpline: +91 91101 13671  |  वेबसाइट: sagarcoaching.tech  |  Slide 27 of 63</a:t>
+              <a:t>वेबसाइट: sagarcoaching.tech  |  Slide 27 of 63</a:t>
             </a:r>
           </a:p>
         </p:txBody>
@@ -12781,7 +12781,7 @@
               </a:defRPr>
             </a:pPr>
             <a:r>
-              <a:t>WhatsApp / Helpline: +91 91101 13671  |  वेबसाइट: sagarcoaching.tech  |  Slide 28 of 63</a:t>
+              <a:t>वेबसाइट: sagarcoaching.tech  |  Slide 28 of 63</a:t>
             </a:r>
           </a:p>
         </p:txBody>
@@ -13299,7 +13299,7 @@
               </a:defRPr>
             </a:pPr>
             <a:r>
-              <a:t>WhatsApp / Helpline: +91 91101 13671  |  वेबसाइट: sagarcoaching.tech  |  Slide 29 of 63</a:t>
+              <a:t>वेबसाइट: sagarcoaching.tech  |  Slide 29 of 63</a:t>
             </a:r>
           </a:p>
         </p:txBody>
@@ -13746,7 +13746,7 @@
               </a:defRPr>
             </a:pPr>
             <a:r>
-              <a:t>WhatsApp / Helpline: +91 91101 13671  |  वेबसाइट: sagarcoaching.tech  |  Slide 3 of 63</a:t>
+              <a:t>वेबसाइट: sagarcoaching.tech  |  Slide 3 of 63</a:t>
             </a:r>
           </a:p>
         </p:txBody>
@@ -14193,7 +14193,7 @@
               </a:defRPr>
             </a:pPr>
             <a:r>
-              <a:t>WhatsApp / Helpline: +91 91101 13671  |  वेबसाइट: sagarcoaching.tech  |  Slide 30 of 63</a:t>
+              <a:t>वेबसाइट: sagarcoaching.tech  |  Slide 30 of 63</a:t>
             </a:r>
           </a:p>
         </p:txBody>
@@ -14711,7 +14711,7 @@
               </a:defRPr>
             </a:pPr>
             <a:r>
-              <a:t>WhatsApp / Helpline: +91 91101 13671  |  वेबसाइट: sagarcoaching.tech  |  Slide 31 of 63</a:t>
+              <a:t>वेबसाइट: sagarcoaching.tech  |  Slide 31 of 63</a:t>
             </a:r>
           </a:p>
         </p:txBody>
@@ -15158,7 +15158,7 @@
               </a:defRPr>
             </a:pPr>
             <a:r>
-              <a:t>WhatsApp / Helpline: +91 91101 13671  |  वेबसाइट: sagarcoaching.tech  |  Slide 32 of 63</a:t>
+              <a:t>वेबसाइट: sagarcoaching.tech  |  Slide 32 of 63</a:t>
             </a:r>
           </a:p>
         </p:txBody>
@@ -15676,7 +15676,7 @@
               </a:defRPr>
             </a:pPr>
             <a:r>
-              <a:t>WhatsApp / Helpline: +91 91101 13671  |  वेबसाइट: sagarcoaching.tech  |  Slide 33 of 63</a:t>
+              <a:t>वेबसाइट: sagarcoaching.tech  |  Slide 33 of 63</a:t>
             </a:r>
           </a:p>
         </p:txBody>
@@ -16123,7 +16123,7 @@
               </a:defRPr>
             </a:pPr>
             <a:r>
-              <a:t>WhatsApp / Helpline: +91 91101 13671  |  वेबसाइट: sagarcoaching.tech  |  Slide 34 of 63</a:t>
+              <a:t>वेबसाइट: sagarcoaching.tech  |  Slide 34 of 63</a:t>
             </a:r>
           </a:p>
         </p:txBody>
@@ -16641,7 +16641,7 @@
               </a:defRPr>
             </a:pPr>
             <a:r>
-              <a:t>WhatsApp / Helpline: +91 91101 13671  |  वेबसाइट: sagarcoaching.tech  |  Slide 35 of 63</a:t>
+              <a:t>वेबसाइट: sagarcoaching.tech  |  Slide 35 of 63</a:t>
             </a:r>
           </a:p>
         </p:txBody>
@@ -17088,7 +17088,7 @@
               </a:defRPr>
             </a:pPr>
             <a:r>
-              <a:t>WhatsApp / Helpline: +91 91101 13671  |  वेबसाइट: sagarcoaching.tech  |  Slide 36 of 63</a:t>
+              <a:t>वेबसाइट: sagarcoaching.tech  |  Slide 36 of 63</a:t>
             </a:r>
           </a:p>
         </p:txBody>
@@ -17606,7 +17606,7 @@
               </a:defRPr>
             </a:pPr>
             <a:r>
-              <a:t>WhatsApp / Helpline: +91 91101 13671  |  वेबसाइट: sagarcoaching.tech  |  Slide 37 of 63</a:t>
+              <a:t>वेबसाइट: sagarcoaching.tech  |  Slide 37 of 63</a:t>
             </a:r>
           </a:p>
         </p:txBody>
@@ -18053,7 +18053,7 @@
               </a:defRPr>
             </a:pPr>
             <a:r>
-              <a:t>WhatsApp / Helpline: +91 91101 13671  |  वेबसाइट: sagarcoaching.tech  |  Slide 38 of 63</a:t>
+              <a:t>वेबसाइट: sagarcoaching.tech  |  Slide 38 of 63</a:t>
             </a:r>
           </a:p>
         </p:txBody>
@@ -18571,7 +18571,7 @@
               </a:defRPr>
             </a:pPr>
             <a:r>
-              <a:t>WhatsApp / Helpline: +91 91101 13671  |  वेबसाइट: sagarcoaching.tech  |  Slide 39 of 63</a:t>
+              <a:t>वेबसाइट: sagarcoaching.tech  |  Slide 39 of 63</a:t>
             </a:r>
           </a:p>
         </p:txBody>
@@ -19018,7 +19018,7 @@
               </a:defRPr>
             </a:pPr>
             <a:r>
-              <a:t>WhatsApp / Helpline: +91 91101 13671  |  वेबसाइट: sagarcoaching.tech  |  Slide 4 of 63</a:t>
+              <a:t>वेबसाइट: sagarcoaching.tech  |  Slide 4 of 63</a:t>
             </a:r>
           </a:p>
         </p:txBody>
@@ -19536,7 +19536,7 @@
               </a:defRPr>
             </a:pPr>
             <a:r>
-              <a:t>WhatsApp / Helpline: +91 91101 13671  |  वेबसाइट: sagarcoaching.tech  |  Slide 40 of 63</a:t>
+              <a:t>वेबसाइट: sagarcoaching.tech  |  Slide 40 of 63</a:t>
             </a:r>
           </a:p>
         </p:txBody>
@@ -20054,7 +20054,7 @@
               </a:defRPr>
             </a:pPr>
             <a:r>
-              <a:t>WhatsApp / Helpline: +91 91101 13671  |  वेबसाइट: sagarcoaching.tech  |  Slide 41 of 63</a:t>
+              <a:t>वेबसाइट: sagarcoaching.tech  |  Slide 41 of 63</a:t>
             </a:r>
           </a:p>
         </p:txBody>
@@ -20501,7 +20501,7 @@
               </a:defRPr>
             </a:pPr>
             <a:r>
-              <a:t>WhatsApp / Helpline: +91 91101 13671  |  वेबसाइट: sagarcoaching.tech  |  Slide 42 of 63</a:t>
+              <a:t>वेबसाइट: sagarcoaching.tech  |  Slide 42 of 63</a:t>
             </a:r>
           </a:p>
         </p:txBody>
@@ -21019,7 +21019,7 @@
               </a:defRPr>
             </a:pPr>
             <a:r>
-              <a:t>WhatsApp / Helpline: +91 91101 13671  |  वेबसाइट: sagarcoaching.tech  |  Slide 43 of 63</a:t>
+              <a:t>वेबसाइट: sagarcoaching.tech  |  Slide 43 of 63</a:t>
             </a:r>
           </a:p>
         </p:txBody>
@@ -21466,7 +21466,7 @@
               </a:defRPr>
             </a:pPr>
             <a:r>
-              <a:t>WhatsApp / Helpline: +91 91101 13671  |  वेबसाइट: sagarcoaching.tech  |  Slide 44 of 63</a:t>
+              <a:t>वेबसाइट: sagarcoaching.tech  |  Slide 44 of 63</a:t>
             </a:r>
           </a:p>
         </p:txBody>
@@ -21984,7 +21984,7 @@
               </a:defRPr>
             </a:pPr>
             <a:r>
-              <a:t>WhatsApp / Helpline: +91 91101 13671  |  वेबसाइट: sagarcoaching.tech  |  Slide 45 of 63</a:t>
+              <a:t>वेबसाइट: sagarcoaching.tech  |  Slide 45 of 63</a:t>
             </a:r>
           </a:p>
         </p:txBody>
@@ -22431,7 +22431,7 @@
               </a:defRPr>
             </a:pPr>
             <a:r>
-              <a:t>WhatsApp / Helpline: +91 91101 13671  |  वेबसाइट: sagarcoaching.tech  |  Slide 46 of 63</a:t>
+              <a:t>वेबसाइट: sagarcoaching.tech  |  Slide 46 of 63</a:t>
             </a:r>
           </a:p>
         </p:txBody>
@@ -22949,7 +22949,7 @@
               </a:defRPr>
             </a:pPr>
             <a:r>
-              <a:t>WhatsApp / Helpline: +91 91101 13671  |  वेबसाइट: sagarcoaching.tech  |  Slide 47 of 63</a:t>
+              <a:t>वेबसाइट: sagarcoaching.tech  |  Slide 47 of 63</a:t>
             </a:r>
           </a:p>
         </p:txBody>
@@ -23396,7 +23396,7 @@
               </a:defRPr>
             </a:pPr>
             <a:r>
-              <a:t>WhatsApp / Helpline: +91 91101 13671  |  वेबसाइट: sagarcoaching.tech  |  Slide 48 of 63</a:t>
+              <a:t>वेबसाइट: sagarcoaching.tech  |  Slide 48 of 63</a:t>
             </a:r>
           </a:p>
         </p:txBody>
@@ -23914,7 +23914,7 @@
               </a:defRPr>
             </a:pPr>
             <a:r>
-              <a:t>WhatsApp / Helpline: +91 91101 13671  |  वेबसाइट: sagarcoaching.tech  |  Slide 49 of 63</a:t>
+              <a:t>वेबसाइट: sagarcoaching.tech  |  Slide 49 of 63</a:t>
             </a:r>
           </a:p>
         </p:txBody>
@@ -24361,7 +24361,7 @@
               </a:defRPr>
             </a:pPr>
             <a:r>
-              <a:t>WhatsApp / Helpline: +91 91101 13671  |  वेबसाइट: sagarcoaching.tech  |  Slide 5 of 63</a:t>
+              <a:t>वेबसाइट: sagarcoaching.tech  |  Slide 5 of 63</a:t>
             </a:r>
           </a:p>
         </p:txBody>
@@ -24808,7 +24808,7 @@
               </a:defRPr>
             </a:pPr>
             <a:r>
-              <a:t>WhatsApp / Helpline: +91 91101 13671  |  वेबसाइट: sagarcoaching.tech  |  Slide 50 of 63</a:t>
+              <a:t>वेबसाइट: sagarcoaching.tech  |  Slide 50 of 63</a:t>
             </a:r>
           </a:p>
         </p:txBody>
@@ -25326,7 +25326,7 @@
               </a:defRPr>
             </a:pPr>
             <a:r>
-              <a:t>WhatsApp / Helpline: +91 91101 13671  |  वेबसाइट: sagarcoaching.tech  |  Slide 51 of 63</a:t>
+              <a:t>वेबसाइट: sagarcoaching.tech  |  Slide 51 of 63</a:t>
             </a:r>
           </a:p>
         </p:txBody>
@@ -25773,7 +25773,7 @@
               </a:defRPr>
             </a:pPr>
             <a:r>
-              <a:t>WhatsApp / Helpline: +91 91101 13671  |  वेबसाइट: sagarcoaching.tech  |  Slide 52 of 63</a:t>
+              <a:t>वेबसाइट: sagarcoaching.tech  |  Slide 52 of 63</a:t>
             </a:r>
           </a:p>
         </p:txBody>
@@ -26291,7 +26291,7 @@
               </a:defRPr>
             </a:pPr>
             <a:r>
-              <a:t>WhatsApp / Helpline: +91 91101 13671  |  वेबसाइट: sagarcoaching.tech  |  Slide 53 of 63</a:t>
+              <a:t>वेबसाइट: sagarcoaching.tech  |  Slide 53 of 63</a:t>
             </a:r>
           </a:p>
         </p:txBody>
@@ -26738,7 +26738,7 @@
               </a:defRPr>
             </a:pPr>
             <a:r>
-              <a:t>WhatsApp / Helpline: +91 91101 13671  |  वेबसाइट: sagarcoaching.tech  |  Slide 54 of 63</a:t>
+              <a:t>वेबसाइट: sagarcoaching.tech  |  Slide 54 of 63</a:t>
             </a:r>
           </a:p>
         </p:txBody>
@@ -27256,7 +27256,7 @@
               </a:defRPr>
             </a:pPr>
             <a:r>
-              <a:t>WhatsApp / Helpline: +91 91101 13671  |  वेबसाइट: sagarcoaching.tech  |  Slide 55 of 63</a:t>
+              <a:t>वेबसाइट: sagarcoaching.tech  |  Slide 55 of 63</a:t>
             </a:r>
           </a:p>
         </p:txBody>
@@ -27703,7 +27703,7 @@
               </a:defRPr>
             </a:pPr>
             <a:r>
-              <a:t>WhatsApp / Helpline: +91 91101 13671  |  वेबसाइट: sagarcoaching.tech  |  Slide 56 of 63</a:t>
+              <a:t>वेबसाइट: sagarcoaching.tech  |  Slide 56 of 63</a:t>
             </a:r>
           </a:p>
         </p:txBody>
@@ -28221,7 +28221,7 @@
               </a:defRPr>
             </a:pPr>
             <a:r>
-              <a:t>WhatsApp / Helpline: +91 91101 13671  |  वेबसाइट: sagarcoaching.tech  |  Slide 57 of 63</a:t>
+              <a:t>वेबसाइट: sagarcoaching.tech  |  Slide 57 of 63</a:t>
             </a:r>
           </a:p>
         </p:txBody>
@@ -28668,7 +28668,7 @@
               </a:defRPr>
             </a:pPr>
             <a:r>
-              <a:t>WhatsApp / Helpline: +91 91101 13671  |  वेबसाइट: sagarcoaching.tech  |  Slide 58 of 63</a:t>
+              <a:t>वेबसाइट: sagarcoaching.tech  |  Slide 58 of 63</a:t>
             </a:r>
           </a:p>
         </p:txBody>
@@ -29186,7 +29186,7 @@
               </a:defRPr>
             </a:pPr>
             <a:r>
-              <a:t>WhatsApp / Helpline: +91 91101 13671  |  वेबसाइट: sagarcoaching.tech  |  Slide 59 of 63</a:t>
+              <a:t>वेबसाइट: sagarcoaching.tech  |  Slide 59 of 63</a:t>
             </a:r>
           </a:p>
         </p:txBody>
@@ -29633,7 +29633,7 @@
               </a:defRPr>
             </a:pPr>
             <a:r>
-              <a:t>WhatsApp / Helpline: +91 91101 13671  |  वेबसाइट: sagarcoaching.tech  |  Slide 6 of 63</a:t>
+              <a:t>वेबसाइट: sagarcoaching.tech  |  Slide 6 of 63</a:t>
             </a:r>
           </a:p>
         </p:txBody>
@@ -30151,7 +30151,7 @@
               </a:defRPr>
             </a:pPr>
             <a:r>
-              <a:t>WhatsApp / Helpline: +91 91101 13671  |  वेबसाइट: sagarcoaching.tech  |  Slide 60 of 63</a:t>
+              <a:t>वेबसाइट: sagarcoaching.tech  |  Slide 60 of 63</a:t>
             </a:r>
           </a:p>
         </p:txBody>
@@ -30669,7 +30669,7 @@
               </a:defRPr>
             </a:pPr>
             <a:r>
-              <a:t>WhatsApp / Helpline: +91 91101 13671  |  वेबसाइट: sagarcoaching.tech  |  Slide 61 of 63</a:t>
+              <a:t>वेबसाइट: sagarcoaching.tech  |  Slide 61 of 63</a:t>
             </a:r>
           </a:p>
         </p:txBody>
@@ -31116,7 +31116,7 @@
               </a:defRPr>
             </a:pPr>
             <a:r>
-              <a:t>WhatsApp / Helpline: +91 91101 13671  |  वेबसाइट: sagarcoaching.tech  |  Slide 62 of 63</a:t>
+              <a:t>वेबसाइट: sagarcoaching.tech  |  Slide 62 of 63</a:t>
             </a:r>
           </a:p>
         </p:txBody>
@@ -31634,7 +31634,7 @@
               </a:defRPr>
             </a:pPr>
             <a:r>
-              <a:t>WhatsApp / Helpline: +91 91101 13671  |  वेबसाइट: sagarcoaching.tech  |  Slide 63 of 63</a:t>
+              <a:t>वेबसाइट: sagarcoaching.tech  |  Slide 63 of 63</a:t>
             </a:r>
           </a:p>
         </p:txBody>
@@ -31956,7 +31956,7 @@
               </a:defRPr>
             </a:pPr>
             <a:r>
-              <a:t>WhatsApp / Helpline: +91 91101 13671  |  वेबसाइट: sagarcoaching.tech  |  Slide 7 of 63</a:t>
+              <a:t>वेबसाइट: sagarcoaching.tech  |  Slide 7 of 63</a:t>
             </a:r>
           </a:p>
         </p:txBody>
@@ -32403,7 +32403,7 @@
               </a:defRPr>
             </a:pPr>
             <a:r>
-              <a:t>WhatsApp / Helpline: +91 91101 13671  |  वेबसाइट: sagarcoaching.tech  |  Slide 8 of 63</a:t>
+              <a:t>वेबसाइट: sagarcoaching.tech  |  Slide 8 of 63</a:t>
             </a:r>
           </a:p>
         </p:txBody>
@@ -32921,7 +32921,7 @@
               </a:defRPr>
             </a:pPr>
             <a:r>
-              <a:t>WhatsApp / Helpline: +91 91101 13671  |  वेबसाइट: sagarcoaching.tech  |  Slide 9 of 63</a:t>
+              <a:t>वेबसाइट: sagarcoaching.tech  |  Slide 9 of 63</a:t>
             </a:r>
           </a:p>
         </p:txBody>
